--- a/materials/A2/A2_R1-2_Revise_and_Check_1-2.pptx
+++ b/materials/A2/A2_R1-2_Revise_and_Check_1-2.pptx
@@ -7060,7 +7060,47 @@
                 <a:ea typeface="Georgia" pitchFamily="34" charset="-122"/>
                 <a:cs typeface="Georgia" pitchFamily="34" charset="-120"/>
               </a:rPr>
-              <a:t>Holiday time is the one time we all take photos. We're in a strange new place, the sun is shining, and we want to record our surroundings and happy memories. So how do we take the perfect holiday photos? Here are three useful tips…</a:t>
+              <a:t>Holiday time is the one time we all take photos. We're in a strange new place, the sun is shining, and we want to record our surroundings and happy memories. </a:t>
+            </a:r>
+            <a:pPr indent="0" marL="0">
+              <a:lnSpc>
+                <a:spcPct val="105000"/>
+              </a:lnSpc>
+              <a:spcAft>
+                <a:spcPts val="700"/>
+              </a:spcAft>
+              <a:buNone/>
+            </a:pPr>
+            <a:r>
+              <a:rPr lang="en-US" sz="900" b="1" u="sng" dirty="0">
+                <a:solidFill>
+                  <a:srgbClr val="7B5CD6"/>
+                </a:solidFill>
+                <a:latin typeface="Georgia" pitchFamily="34" charset="0"/>
+                <a:ea typeface="Georgia" pitchFamily="34" charset="-122"/>
+                <a:cs typeface="Georgia" pitchFamily="34" charset="-120"/>
+              </a:rPr>
+              <a:t>So</a:t>
+            </a:r>
+            <a:pPr indent="0" marL="0">
+              <a:lnSpc>
+                <a:spcPct val="105000"/>
+              </a:lnSpc>
+              <a:spcAft>
+                <a:spcPts val="700"/>
+              </a:spcAft>
+              <a:buNone/>
+            </a:pPr>
+            <a:r>
+              <a:rPr lang="en-US" sz="900" dirty="0">
+                <a:solidFill>
+                  <a:srgbClr val="1B2559"/>
+                </a:solidFill>
+                <a:latin typeface="Georgia" pitchFamily="34" charset="0"/>
+                <a:ea typeface="Georgia" pitchFamily="34" charset="-122"/>
+                <a:cs typeface="Georgia" pitchFamily="34" charset="-120"/>
+              </a:rPr>
+              <a:t> how do we take the perfect holiday photos? Here are three useful tips…</a:t>
             </a:r>
             <a:endParaRPr lang="en-US" sz="900" dirty="0"/>
           </a:p>
@@ -7083,7 +7123,87 @@
                 <a:ea typeface="Georgia" pitchFamily="34" charset="-122"/>
                 <a:cs typeface="Georgia" pitchFamily="34" charset="-120"/>
               </a:rPr>
-              <a:t>1 ____  I took this photo in Bruges in Belgium. I got up and, when my friends were having breakfast, I went for a walk with my camera. This gave me three advantages: – The sun was low in the sky and the light was beautiful and warm. – There were no people around. – My friends didn't need to wait patiently when I was taking photos. The light in the evening is also good, but there are a lot more people around. There are times, in the local market, for example, when having lots of people in the photo can be a good thing, but most of the time I prefer my photos to be less crowded.</a:t>
+              <a:t>1 ____  I took this photo in Bruges in Belgium. I got up and, when my friends </a:t>
+            </a:r>
+            <a:pPr indent="0" marL="0">
+              <a:lnSpc>
+                <a:spcPct val="105000"/>
+              </a:lnSpc>
+              <a:spcAft>
+                <a:spcPts val="700"/>
+              </a:spcAft>
+              <a:buNone/>
+            </a:pPr>
+            <a:r>
+              <a:rPr lang="en-US" sz="900" b="1" u="sng" dirty="0">
+                <a:solidFill>
+                  <a:srgbClr val="7B5CD6"/>
+                </a:solidFill>
+                <a:latin typeface="Georgia" pitchFamily="34" charset="0"/>
+                <a:ea typeface="Georgia" pitchFamily="34" charset="-122"/>
+                <a:cs typeface="Georgia" pitchFamily="34" charset="-120"/>
+              </a:rPr>
+              <a:t>were having</a:t>
+            </a:r>
+            <a:pPr indent="0" marL="0">
+              <a:lnSpc>
+                <a:spcPct val="105000"/>
+              </a:lnSpc>
+              <a:spcAft>
+                <a:spcPts val="700"/>
+              </a:spcAft>
+              <a:buNone/>
+            </a:pPr>
+            <a:r>
+              <a:rPr lang="en-US" sz="900" dirty="0">
+                <a:solidFill>
+                  <a:srgbClr val="1B2559"/>
+                </a:solidFill>
+                <a:latin typeface="Georgia" pitchFamily="34" charset="0"/>
+                <a:ea typeface="Georgia" pitchFamily="34" charset="-122"/>
+                <a:cs typeface="Georgia" pitchFamily="34" charset="-120"/>
+              </a:rPr>
+              <a:t> breakfast, I went for a walk with my camera. This gave me three advantages: – The sun was low in the sky and the light was beautiful and warm. – There were no people around. – My friends didn't need to wait patiently when I </a:t>
+            </a:r>
+            <a:pPr indent="0" marL="0">
+              <a:lnSpc>
+                <a:spcPct val="105000"/>
+              </a:lnSpc>
+              <a:spcAft>
+                <a:spcPts val="700"/>
+              </a:spcAft>
+              <a:buNone/>
+            </a:pPr>
+            <a:r>
+              <a:rPr lang="en-US" sz="900" b="1" u="sng" dirty="0">
+                <a:solidFill>
+                  <a:srgbClr val="7B5CD6"/>
+                </a:solidFill>
+                <a:latin typeface="Georgia" pitchFamily="34" charset="0"/>
+                <a:ea typeface="Georgia" pitchFamily="34" charset="-122"/>
+                <a:cs typeface="Georgia" pitchFamily="34" charset="-120"/>
+              </a:rPr>
+              <a:t>was taking</a:t>
+            </a:r>
+            <a:pPr indent="0" marL="0">
+              <a:lnSpc>
+                <a:spcPct val="105000"/>
+              </a:lnSpc>
+              <a:spcAft>
+                <a:spcPts val="700"/>
+              </a:spcAft>
+              <a:buNone/>
+            </a:pPr>
+            <a:r>
+              <a:rPr lang="en-US" sz="900" dirty="0">
+                <a:solidFill>
+                  <a:srgbClr val="1B2559"/>
+                </a:solidFill>
+                <a:latin typeface="Georgia" pitchFamily="34" charset="0"/>
+                <a:ea typeface="Georgia" pitchFamily="34" charset="-122"/>
+                <a:cs typeface="Georgia" pitchFamily="34" charset="-120"/>
+              </a:rPr>
+              <a:t> photos. The light in the evening is also good, but there are a lot more people around. There are times, in the local market, for example, when having lots of people in the photo can be a good thing, but most of the time I prefer my photos to be less crowded.</a:t>
             </a:r>
             <a:endParaRPr lang="en-US" sz="900" dirty="0"/>
           </a:p>
@@ -7106,7 +7226,47 @@
                 <a:ea typeface="Georgia" pitchFamily="34" charset="-122"/>
                 <a:cs typeface="Georgia" pitchFamily="34" charset="-120"/>
               </a:rPr>
-              <a:t>2 ____  I took these two photos of the Forbidden City in Beijing, and I think the picture on the right is much better. Try not to take exactly the same picture as millions of other people – look for little details that other photographers haven't seen. Although I am a very enthusiastic photographer, I often buy a nice postcard of the places I visit – much better than going home with pictures that aren't very good.</a:t>
+              <a:t>2 ____  I took these two photos of the Forbidden City in Beijing, and I think the picture on the right is much better. Try not to take exactly the same picture as millions of other people – look for little details that other photographers haven't seen. </a:t>
+            </a:r>
+            <a:pPr indent="0" marL="0">
+              <a:lnSpc>
+                <a:spcPct val="105000"/>
+              </a:lnSpc>
+              <a:spcAft>
+                <a:spcPts val="700"/>
+              </a:spcAft>
+              <a:buNone/>
+            </a:pPr>
+            <a:r>
+              <a:rPr lang="en-US" sz="900" b="1" u="sng" dirty="0">
+                <a:solidFill>
+                  <a:srgbClr val="7B5CD6"/>
+                </a:solidFill>
+                <a:latin typeface="Georgia" pitchFamily="34" charset="0"/>
+                <a:ea typeface="Georgia" pitchFamily="34" charset="-122"/>
+                <a:cs typeface="Georgia" pitchFamily="34" charset="-120"/>
+              </a:rPr>
+              <a:t>Although</a:t>
+            </a:r>
+            <a:pPr indent="0" marL="0">
+              <a:lnSpc>
+                <a:spcPct val="105000"/>
+              </a:lnSpc>
+              <a:spcAft>
+                <a:spcPts val="700"/>
+              </a:spcAft>
+              <a:buNone/>
+            </a:pPr>
+            <a:r>
+              <a:rPr lang="en-US" sz="900" dirty="0">
+                <a:solidFill>
+                  <a:srgbClr val="1B2559"/>
+                </a:solidFill>
+                <a:latin typeface="Georgia" pitchFamily="34" charset="0"/>
+                <a:ea typeface="Georgia" pitchFamily="34" charset="-122"/>
+                <a:cs typeface="Georgia" pitchFamily="34" charset="-120"/>
+              </a:rPr>
+              <a:t> I am a very enthusiastic photographer, I often buy a nice postcard of the places I visit – much better than going home with pictures that aren't very good.</a:t>
             </a:r>
             <a:endParaRPr lang="en-US" sz="900" dirty="0"/>
           </a:p>
@@ -7129,7 +7289,47 @@
                 <a:ea typeface="Georgia" pitchFamily="34" charset="-122"/>
                 <a:cs typeface="Georgia" pitchFamily="34" charset="-120"/>
               </a:rPr>
-              <a:t>3 ____  These are the gardens outside the Louvre in Paris. We spent all day looking at the paintings, and we were walking back to the hotel when we saw someone feeding the birds. I only had my little camera with me, but it was all I needed. I quickly took maybe 30 photos from different angles, and this one is the best.</a:t>
+              <a:t>3 ____  These are the gardens outside the Louvre in Paris. We spent all day looking at the paintings, and we </a:t>
+            </a:r>
+            <a:pPr indent="0" marL="0">
+              <a:lnSpc>
+                <a:spcPct val="105000"/>
+              </a:lnSpc>
+              <a:spcAft>
+                <a:spcPts val="700"/>
+              </a:spcAft>
+              <a:buNone/>
+            </a:pPr>
+            <a:r>
+              <a:rPr lang="en-US" sz="900" b="1" u="sng" dirty="0">
+                <a:solidFill>
+                  <a:srgbClr val="7B5CD6"/>
+                </a:solidFill>
+                <a:latin typeface="Georgia" pitchFamily="34" charset="0"/>
+                <a:ea typeface="Georgia" pitchFamily="34" charset="-122"/>
+                <a:cs typeface="Georgia" pitchFamily="34" charset="-120"/>
+              </a:rPr>
+              <a:t>were walking</a:t>
+            </a:r>
+            <a:pPr indent="0" marL="0">
+              <a:lnSpc>
+                <a:spcPct val="105000"/>
+              </a:lnSpc>
+              <a:spcAft>
+                <a:spcPts val="700"/>
+              </a:spcAft>
+              <a:buNone/>
+            </a:pPr>
+            <a:r>
+              <a:rPr lang="en-US" sz="900" dirty="0">
+                <a:solidFill>
+                  <a:srgbClr val="1B2559"/>
+                </a:solidFill>
+                <a:latin typeface="Georgia" pitchFamily="34" charset="0"/>
+                <a:ea typeface="Georgia" pitchFamily="34" charset="-122"/>
+                <a:cs typeface="Georgia" pitchFamily="34" charset="-120"/>
+              </a:rPr>
+              <a:t> back to the hotel when we saw someone feeding the birds. I only had my little camera with me, but it was all I needed. I quickly took maybe 30 photos from different angles, and this one is the best.</a:t>
             </a:r>
             <a:endParaRPr lang="en-US" sz="900" dirty="0"/>
           </a:p>
@@ -7199,7 +7399,47 @@
                 <a:ea typeface="Georgia" pitchFamily="34" charset="-122"/>
                 <a:cs typeface="Georgia" pitchFamily="34" charset="-120"/>
               </a:rPr>
-              <a:t>Holiday time is the one time we all take photos. We're in a strange new place, the sun is shining, and we want to record our surroundings and happy memories. So how do we take the perfect holiday photos? Here are three useful tips…</a:t>
+              <a:t>Holiday time is the one time we all take photos. We're in a strange new place, the sun is shining, and we want to record our surroundings and happy memories. </a:t>
+            </a:r>
+            <a:pPr indent="0" marL="0">
+              <a:lnSpc>
+                <a:spcPct val="105000"/>
+              </a:lnSpc>
+              <a:spcAft>
+                <a:spcPts val="700"/>
+              </a:spcAft>
+              <a:buNone/>
+            </a:pPr>
+            <a:r>
+              <a:rPr lang="en-US" sz="900" b="1" u="sng" dirty="0">
+                <a:solidFill>
+                  <a:srgbClr val="7B5CD6"/>
+                </a:solidFill>
+                <a:latin typeface="Georgia" pitchFamily="34" charset="0"/>
+                <a:ea typeface="Georgia" pitchFamily="34" charset="-122"/>
+                <a:cs typeface="Georgia" pitchFamily="34" charset="-120"/>
+              </a:rPr>
+              <a:t>So</a:t>
+            </a:r>
+            <a:pPr indent="0" marL="0">
+              <a:lnSpc>
+                <a:spcPct val="105000"/>
+              </a:lnSpc>
+              <a:spcAft>
+                <a:spcPts val="700"/>
+              </a:spcAft>
+              <a:buNone/>
+            </a:pPr>
+            <a:r>
+              <a:rPr lang="en-US" sz="900" dirty="0">
+                <a:solidFill>
+                  <a:srgbClr val="1B2559"/>
+                </a:solidFill>
+                <a:latin typeface="Georgia" pitchFamily="34" charset="0"/>
+                <a:ea typeface="Georgia" pitchFamily="34" charset="-122"/>
+                <a:cs typeface="Georgia" pitchFamily="34" charset="-120"/>
+              </a:rPr>
+              <a:t> how do we take the perfect holiday photos? Here are three useful tips…</a:t>
             </a:r>
             <a:endParaRPr lang="en-US" sz="900" dirty="0"/>
           </a:p>
@@ -7265,7 +7505,47 @@
                 <a:ea typeface="Georgia" pitchFamily="34" charset="-122"/>
                 <a:cs typeface="Georgia" pitchFamily="34" charset="-120"/>
               </a:rPr>
-              <a:t>, I went for a walk with my camera. This gave me three advantages: – The sun was low in the sky and the light was beautiful and warm. – There were no people around. – My friends didn't need to wait patiently when I was taking photos. The light in the evening is also good, but there are a lot more people around. There are times, in the local market, for example, when having lots of people in the photo can be a good thing, but most of the time I prefer my photos to be less crowded.</a:t>
+              <a:t>, I went for a walk with my camera. This gave me three advantages: – The sun was low in the sky and the light was beautiful and warm. – There were no people around. – My friends didn't need to wait patiently when I </a:t>
+            </a:r>
+            <a:pPr indent="0" marL="0">
+              <a:lnSpc>
+                <a:spcPct val="105000"/>
+              </a:lnSpc>
+              <a:spcAft>
+                <a:spcPts val="700"/>
+              </a:spcAft>
+              <a:buNone/>
+            </a:pPr>
+            <a:r>
+              <a:rPr lang="en-US" sz="900" b="1" u="sng" dirty="0">
+                <a:solidFill>
+                  <a:srgbClr val="7B5CD6"/>
+                </a:solidFill>
+                <a:latin typeface="Georgia" pitchFamily="34" charset="0"/>
+                <a:ea typeface="Georgia" pitchFamily="34" charset="-122"/>
+                <a:cs typeface="Georgia" pitchFamily="34" charset="-120"/>
+              </a:rPr>
+              <a:t>was taking</a:t>
+            </a:r>
+            <a:pPr indent="0" marL="0">
+              <a:lnSpc>
+                <a:spcPct val="105000"/>
+              </a:lnSpc>
+              <a:spcAft>
+                <a:spcPts val="700"/>
+              </a:spcAft>
+              <a:buNone/>
+            </a:pPr>
+            <a:r>
+              <a:rPr lang="en-US" sz="900" dirty="0">
+                <a:solidFill>
+                  <a:srgbClr val="1B2559"/>
+                </a:solidFill>
+                <a:latin typeface="Georgia" pitchFamily="34" charset="0"/>
+                <a:ea typeface="Georgia" pitchFamily="34" charset="-122"/>
+                <a:cs typeface="Georgia" pitchFamily="34" charset="-120"/>
+              </a:rPr>
+              <a:t> photos. The light in the evening is also good, but there are a lot more people around. There are times, in the local market, for example, when having lots of people in the photo can be a good thing, but most of the time I prefer my photos to be less crowded.</a:t>
             </a:r>
             <a:endParaRPr lang="en-US" sz="900" dirty="0"/>
           </a:p>
@@ -7331,7 +7611,47 @@
                 <a:ea typeface="Georgia" pitchFamily="34" charset="-122"/>
                 <a:cs typeface="Georgia" pitchFamily="34" charset="-120"/>
               </a:rPr>
-              <a:t> that other photographers haven't seen. Although I am a very enthusiastic photographer, I often buy a nice postcard of the places I visit – much better than going home with pictures that aren't very good.</a:t>
+              <a:t> that other photographers haven't seen. </a:t>
+            </a:r>
+            <a:pPr indent="0" marL="0">
+              <a:lnSpc>
+                <a:spcPct val="105000"/>
+              </a:lnSpc>
+              <a:spcAft>
+                <a:spcPts val="700"/>
+              </a:spcAft>
+              <a:buNone/>
+            </a:pPr>
+            <a:r>
+              <a:rPr lang="en-US" sz="900" b="1" u="sng" dirty="0">
+                <a:solidFill>
+                  <a:srgbClr val="7B5CD6"/>
+                </a:solidFill>
+                <a:latin typeface="Georgia" pitchFamily="34" charset="0"/>
+                <a:ea typeface="Georgia" pitchFamily="34" charset="-122"/>
+                <a:cs typeface="Georgia" pitchFamily="34" charset="-120"/>
+              </a:rPr>
+              <a:t>Although</a:t>
+            </a:r>
+            <a:pPr indent="0" marL="0">
+              <a:lnSpc>
+                <a:spcPct val="105000"/>
+              </a:lnSpc>
+              <a:spcAft>
+                <a:spcPts val="700"/>
+              </a:spcAft>
+              <a:buNone/>
+            </a:pPr>
+            <a:r>
+              <a:rPr lang="en-US" sz="900" dirty="0">
+                <a:solidFill>
+                  <a:srgbClr val="1B2559"/>
+                </a:solidFill>
+                <a:latin typeface="Georgia" pitchFamily="34" charset="0"/>
+                <a:ea typeface="Georgia" pitchFamily="34" charset="-122"/>
+                <a:cs typeface="Georgia" pitchFamily="34" charset="-120"/>
+              </a:rPr>
+              <a:t> I am a very enthusiastic photographer, I often buy a nice postcard of the places I visit – much better than going home with pictures that aren't very good.</a:t>
             </a:r>
             <a:endParaRPr lang="en-US" sz="900" dirty="0"/>
           </a:p>
@@ -7354,7 +7674,47 @@
                 <a:ea typeface="Georgia" pitchFamily="34" charset="-122"/>
                 <a:cs typeface="Georgia" pitchFamily="34" charset="-120"/>
               </a:rPr>
-              <a:t>3 ____  These are the gardens outside the Louvre in Paris. We spent all day looking at the paintings, and we were walking back to the hotel when we saw someone feeding the birds. I only had my little camera with me, but it was all I needed. </a:t>
+              <a:t>3 ____  These are the gardens outside the Louvre in Paris. We spent all day looking at the paintings, and we </a:t>
+            </a:r>
+            <a:pPr indent="0" marL="0">
+              <a:lnSpc>
+                <a:spcPct val="105000"/>
+              </a:lnSpc>
+              <a:spcAft>
+                <a:spcPts val="700"/>
+              </a:spcAft>
+              <a:buNone/>
+            </a:pPr>
+            <a:r>
+              <a:rPr lang="en-US" sz="900" b="1" u="sng" dirty="0">
+                <a:solidFill>
+                  <a:srgbClr val="7B5CD6"/>
+                </a:solidFill>
+                <a:latin typeface="Georgia" pitchFamily="34" charset="0"/>
+                <a:ea typeface="Georgia" pitchFamily="34" charset="-122"/>
+                <a:cs typeface="Georgia" pitchFamily="34" charset="-120"/>
+              </a:rPr>
+              <a:t>were walking</a:t>
+            </a:r>
+            <a:pPr indent="0" marL="0">
+              <a:lnSpc>
+                <a:spcPct val="105000"/>
+              </a:lnSpc>
+              <a:spcAft>
+                <a:spcPts val="700"/>
+              </a:spcAft>
+              <a:buNone/>
+            </a:pPr>
+            <a:r>
+              <a:rPr lang="en-US" sz="900" dirty="0">
+                <a:solidFill>
+                  <a:srgbClr val="1B2559"/>
+                </a:solidFill>
+                <a:latin typeface="Georgia" pitchFamily="34" charset="0"/>
+                <a:ea typeface="Georgia" pitchFamily="34" charset="-122"/>
+                <a:cs typeface="Georgia" pitchFamily="34" charset="-120"/>
+              </a:rPr>
+              <a:t> back to the hotel when we saw someone feeding the birds. I only had my little camera with me, but it was all I needed. </a:t>
             </a:r>
             <a:pPr indent="0" marL="0">
               <a:lnSpc>
@@ -8309,7 +8669,87 @@
                 <a:ea typeface="Georgia" pitchFamily="34" charset="-122"/>
                 <a:cs typeface="Georgia" pitchFamily="34" charset="-120"/>
               </a:rPr>
-              <a:t>1 Start early  I took this photo in Bruges in Belgium. I got up and, when my friends were having breakfast, I went for a walk with my camera. This gave me three advantages: – The sun was low in the sky and the light was beautiful and warm. – There were no people around. – My friends didn't need to wait patiently when I was taking photos. The light in the evening is also good, but there are a lot more people around. There are times, in the local market, for example, when having lots of people in the photo can be a good thing, but most of the time I prefer my photos to be less crowded.</a:t>
+              <a:t>1 Start early  I took this photo in Bruges in Belgium. I got up and, when my friends </a:t>
+            </a:r>
+            <a:pPr indent="0" marL="0">
+              <a:lnSpc>
+                <a:spcPct val="105000"/>
+              </a:lnSpc>
+              <a:spcAft>
+                <a:spcPts val="700"/>
+              </a:spcAft>
+              <a:buNone/>
+            </a:pPr>
+            <a:r>
+              <a:rPr lang="en-US" sz="950" b="1" u="sng" dirty="0">
+                <a:solidFill>
+                  <a:srgbClr val="7B5CD6"/>
+                </a:solidFill>
+                <a:latin typeface="Georgia" pitchFamily="34" charset="0"/>
+                <a:ea typeface="Georgia" pitchFamily="34" charset="-122"/>
+                <a:cs typeface="Georgia" pitchFamily="34" charset="-120"/>
+              </a:rPr>
+              <a:t>were having</a:t>
+            </a:r>
+            <a:pPr indent="0" marL="0">
+              <a:lnSpc>
+                <a:spcPct val="105000"/>
+              </a:lnSpc>
+              <a:spcAft>
+                <a:spcPts val="700"/>
+              </a:spcAft>
+              <a:buNone/>
+            </a:pPr>
+            <a:r>
+              <a:rPr lang="en-US" sz="950" dirty="0">
+                <a:solidFill>
+                  <a:srgbClr val="1B2559"/>
+                </a:solidFill>
+                <a:latin typeface="Georgia" pitchFamily="34" charset="0"/>
+                <a:ea typeface="Georgia" pitchFamily="34" charset="-122"/>
+                <a:cs typeface="Georgia" pitchFamily="34" charset="-120"/>
+              </a:rPr>
+              <a:t> breakfast, I went for a walk with my camera. This gave me three advantages: – The sun was low in the sky and the light was beautiful and warm. – There were no people around. – My friends didn't need to wait patiently when I </a:t>
+            </a:r>
+            <a:pPr indent="0" marL="0">
+              <a:lnSpc>
+                <a:spcPct val="105000"/>
+              </a:lnSpc>
+              <a:spcAft>
+                <a:spcPts val="700"/>
+              </a:spcAft>
+              <a:buNone/>
+            </a:pPr>
+            <a:r>
+              <a:rPr lang="en-US" sz="950" b="1" u="sng" dirty="0">
+                <a:solidFill>
+                  <a:srgbClr val="7B5CD6"/>
+                </a:solidFill>
+                <a:latin typeface="Georgia" pitchFamily="34" charset="0"/>
+                <a:ea typeface="Georgia" pitchFamily="34" charset="-122"/>
+                <a:cs typeface="Georgia" pitchFamily="34" charset="-120"/>
+              </a:rPr>
+              <a:t>was taking</a:t>
+            </a:r>
+            <a:pPr indent="0" marL="0">
+              <a:lnSpc>
+                <a:spcPct val="105000"/>
+              </a:lnSpc>
+              <a:spcAft>
+                <a:spcPts val="700"/>
+              </a:spcAft>
+              <a:buNone/>
+            </a:pPr>
+            <a:r>
+              <a:rPr lang="en-US" sz="950" dirty="0">
+                <a:solidFill>
+                  <a:srgbClr val="1B2559"/>
+                </a:solidFill>
+                <a:latin typeface="Georgia" pitchFamily="34" charset="0"/>
+                <a:ea typeface="Georgia" pitchFamily="34" charset="-122"/>
+                <a:cs typeface="Georgia" pitchFamily="34" charset="-120"/>
+              </a:rPr>
+              <a:t> photos. The light in the evening is also good, but there are a lot more people around. There are times, in the local market, for example, when having lots of people in the photo can be a good thing, but most of the time I prefer my photos to be less crowded.</a:t>
             </a:r>
             <a:endParaRPr lang="en-US" sz="950" dirty="0"/>
           </a:p>
@@ -8332,7 +8772,47 @@
                 <a:ea typeface="Georgia" pitchFamily="34" charset="-122"/>
                 <a:cs typeface="Georgia" pitchFamily="34" charset="-120"/>
               </a:rPr>
-              <a:t>2 Zoom in  I took these two photos of the Forbidden City in Beijing, and I think the picture on the right is much better. Try not to take exactly the same picture as millions of other people – look for little details that other photographers haven't seen. Although I am a very enthusiastic photographer, I often buy a nice postcard of the places I visit – much better than going home with pictures that aren't very good.</a:t>
+              <a:t>2 Zoom in  I took these two photos of the Forbidden City in Beijing, and I think the picture on the right is much better. Try not to take exactly the same picture as millions of other people – look for little details that other photographers haven't seen. </a:t>
+            </a:r>
+            <a:pPr indent="0" marL="0">
+              <a:lnSpc>
+                <a:spcPct val="105000"/>
+              </a:lnSpc>
+              <a:spcAft>
+                <a:spcPts val="700"/>
+              </a:spcAft>
+              <a:buNone/>
+            </a:pPr>
+            <a:r>
+              <a:rPr lang="en-US" sz="950" b="1" u="sng" dirty="0">
+                <a:solidFill>
+                  <a:srgbClr val="7B5CD6"/>
+                </a:solidFill>
+                <a:latin typeface="Georgia" pitchFamily="34" charset="0"/>
+                <a:ea typeface="Georgia" pitchFamily="34" charset="-122"/>
+                <a:cs typeface="Georgia" pitchFamily="34" charset="-120"/>
+              </a:rPr>
+              <a:t>Although</a:t>
+            </a:r>
+            <a:pPr indent="0" marL="0">
+              <a:lnSpc>
+                <a:spcPct val="105000"/>
+              </a:lnSpc>
+              <a:spcAft>
+                <a:spcPts val="700"/>
+              </a:spcAft>
+              <a:buNone/>
+            </a:pPr>
+            <a:r>
+              <a:rPr lang="en-US" sz="950" dirty="0">
+                <a:solidFill>
+                  <a:srgbClr val="1B2559"/>
+                </a:solidFill>
+                <a:latin typeface="Georgia" pitchFamily="34" charset="0"/>
+                <a:ea typeface="Georgia" pitchFamily="34" charset="-122"/>
+                <a:cs typeface="Georgia" pitchFamily="34" charset="-120"/>
+              </a:rPr>
+              <a:t> I am a very enthusiastic photographer, I often buy a nice postcard of the places I visit – much better than going home with pictures that aren't very good.</a:t>
             </a:r>
             <a:endParaRPr lang="en-US" sz="950" dirty="0"/>
           </a:p>
@@ -8355,7 +8835,47 @@
                 <a:ea typeface="Georgia" pitchFamily="34" charset="-122"/>
                 <a:cs typeface="Georgia" pitchFamily="34" charset="-120"/>
               </a:rPr>
-              <a:t>3 Take more than one  These are the gardens outside the Louvre in Paris. We spent all day looking at the paintings, and we were walking back to the hotel when we saw someone feeding the birds. I only had my little camera with me, but it was all I needed. I quickly took maybe 30 photos from different angles, and this one is the best.</a:t>
+              <a:t>3 Take more than one  These are the gardens outside the Louvre in Paris. We spent all day looking at the paintings, and we </a:t>
+            </a:r>
+            <a:pPr indent="0" marL="0">
+              <a:lnSpc>
+                <a:spcPct val="105000"/>
+              </a:lnSpc>
+              <a:spcAft>
+                <a:spcPts val="700"/>
+              </a:spcAft>
+              <a:buNone/>
+            </a:pPr>
+            <a:r>
+              <a:rPr lang="en-US" sz="950" b="1" u="sng" dirty="0">
+                <a:solidFill>
+                  <a:srgbClr val="7B5CD6"/>
+                </a:solidFill>
+                <a:latin typeface="Georgia" pitchFamily="34" charset="0"/>
+                <a:ea typeface="Georgia" pitchFamily="34" charset="-122"/>
+                <a:cs typeface="Georgia" pitchFamily="34" charset="-120"/>
+              </a:rPr>
+              <a:t>were walking</a:t>
+            </a:r>
+            <a:pPr indent="0" marL="0">
+              <a:lnSpc>
+                <a:spcPct val="105000"/>
+              </a:lnSpc>
+              <a:spcAft>
+                <a:spcPts val="700"/>
+              </a:spcAft>
+              <a:buNone/>
+            </a:pPr>
+            <a:r>
+              <a:rPr lang="en-US" sz="950" dirty="0">
+                <a:solidFill>
+                  <a:srgbClr val="1B2559"/>
+                </a:solidFill>
+                <a:latin typeface="Georgia" pitchFamily="34" charset="0"/>
+                <a:ea typeface="Georgia" pitchFamily="34" charset="-122"/>
+                <a:cs typeface="Georgia" pitchFamily="34" charset="-120"/>
+              </a:rPr>
+              <a:t> back to the hotel when we saw someone feeding the birds. I only had my little camera with me, but it was all I needed. I quickly took maybe 30 photos from different angles, and this one is the best.</a:t>
             </a:r>
             <a:endParaRPr lang="en-US" sz="950" dirty="0"/>
           </a:p>
@@ -8425,7 +8945,47 @@
                 <a:ea typeface="Georgia" pitchFamily="34" charset="-122"/>
                 <a:cs typeface="Georgia" pitchFamily="34" charset="-120"/>
               </a:rPr>
-              <a:t>1 Start early  I took this photo in Bruges in Belgium. I got up and, when my friends were having breakfast, I went for a walk with my camera. This gave me three advantages: – </a:t>
+              <a:t>1 Start early  I took this photo in Bruges in Belgium. I got up and, when my friends </a:t>
+            </a:r>
+            <a:pPr indent="0" marL="0">
+              <a:lnSpc>
+                <a:spcPct val="105000"/>
+              </a:lnSpc>
+              <a:spcAft>
+                <a:spcPts val="700"/>
+              </a:spcAft>
+              <a:buNone/>
+            </a:pPr>
+            <a:r>
+              <a:rPr lang="en-US" sz="950" b="1" u="sng" dirty="0">
+                <a:solidFill>
+                  <a:srgbClr val="7B5CD6"/>
+                </a:solidFill>
+                <a:latin typeface="Georgia" pitchFamily="34" charset="0"/>
+                <a:ea typeface="Georgia" pitchFamily="34" charset="-122"/>
+                <a:cs typeface="Georgia" pitchFamily="34" charset="-120"/>
+              </a:rPr>
+              <a:t>were having</a:t>
+            </a:r>
+            <a:pPr indent="0" marL="0">
+              <a:lnSpc>
+                <a:spcPct val="105000"/>
+              </a:lnSpc>
+              <a:spcAft>
+                <a:spcPts val="700"/>
+              </a:spcAft>
+              <a:buNone/>
+            </a:pPr>
+            <a:r>
+              <a:rPr lang="en-US" sz="950" dirty="0">
+                <a:solidFill>
+                  <a:srgbClr val="1B2559"/>
+                </a:solidFill>
+                <a:latin typeface="Georgia" pitchFamily="34" charset="0"/>
+                <a:ea typeface="Georgia" pitchFamily="34" charset="-122"/>
+                <a:cs typeface="Georgia" pitchFamily="34" charset="-120"/>
+              </a:rPr>
+              <a:t> breakfast, I went for a walk with my camera. This gave me three advantages: – </a:t>
             </a:r>
             <a:pPr indent="0" marL="0">
               <a:lnSpc>
@@ -8468,7 +9028,47 @@
                 <a:ea typeface="Georgia" pitchFamily="34" charset="-122"/>
                 <a:cs typeface="Georgia" pitchFamily="34" charset="-120"/>
               </a:rPr>
-              <a:t> and warm. – There were no people around. – My friends didn't need to wait patiently when I was taking photos. The light in the evening is also good, but there are a lot more people around. There are times, in the local market, for example, when having lots of people in the photo can be a good thing, but </a:t>
+              <a:t> and warm. – There were no people around. – My friends didn't need to wait patiently when I </a:t>
+            </a:r>
+            <a:pPr indent="0" marL="0">
+              <a:lnSpc>
+                <a:spcPct val="105000"/>
+              </a:lnSpc>
+              <a:spcAft>
+                <a:spcPts val="700"/>
+              </a:spcAft>
+              <a:buNone/>
+            </a:pPr>
+            <a:r>
+              <a:rPr lang="en-US" sz="950" b="1" u="sng" dirty="0">
+                <a:solidFill>
+                  <a:srgbClr val="7B5CD6"/>
+                </a:solidFill>
+                <a:latin typeface="Georgia" pitchFamily="34" charset="0"/>
+                <a:ea typeface="Georgia" pitchFamily="34" charset="-122"/>
+                <a:cs typeface="Georgia" pitchFamily="34" charset="-120"/>
+              </a:rPr>
+              <a:t>was taking</a:t>
+            </a:r>
+            <a:pPr indent="0" marL="0">
+              <a:lnSpc>
+                <a:spcPct val="105000"/>
+              </a:lnSpc>
+              <a:spcAft>
+                <a:spcPts val="700"/>
+              </a:spcAft>
+              <a:buNone/>
+            </a:pPr>
+            <a:r>
+              <a:rPr lang="en-US" sz="950" dirty="0">
+                <a:solidFill>
+                  <a:srgbClr val="1B2559"/>
+                </a:solidFill>
+                <a:latin typeface="Georgia" pitchFamily="34" charset="0"/>
+                <a:ea typeface="Georgia" pitchFamily="34" charset="-122"/>
+                <a:cs typeface="Georgia" pitchFamily="34" charset="-120"/>
+              </a:rPr>
+              <a:t> photos. The light in the evening is also good, but there are a lot more people around. There are times, in the local market, for example, when having lots of people in the photo can be a good thing, but </a:t>
             </a:r>
             <a:pPr indent="0" marL="0">
               <a:lnSpc>
@@ -8577,7 +9177,47 @@
                 <a:ea typeface="Georgia" pitchFamily="34" charset="-122"/>
                 <a:cs typeface="Georgia" pitchFamily="34" charset="-120"/>
               </a:rPr>
-              <a:t> as millions of other people – look for little details that other photographers haven't seen. Although I am a very enthusiastic photographer, </a:t>
+              <a:t> as millions of other people – look for little details that other photographers haven't seen. </a:t>
+            </a:r>
+            <a:pPr indent="0" marL="0">
+              <a:lnSpc>
+                <a:spcPct val="105000"/>
+              </a:lnSpc>
+              <a:spcAft>
+                <a:spcPts val="700"/>
+              </a:spcAft>
+              <a:buNone/>
+            </a:pPr>
+            <a:r>
+              <a:rPr lang="en-US" sz="950" b="1" u="sng" dirty="0">
+                <a:solidFill>
+                  <a:srgbClr val="7B5CD6"/>
+                </a:solidFill>
+                <a:latin typeface="Georgia" pitchFamily="34" charset="0"/>
+                <a:ea typeface="Georgia" pitchFamily="34" charset="-122"/>
+                <a:cs typeface="Georgia" pitchFamily="34" charset="-120"/>
+              </a:rPr>
+              <a:t>Although</a:t>
+            </a:r>
+            <a:pPr indent="0" marL="0">
+              <a:lnSpc>
+                <a:spcPct val="105000"/>
+              </a:lnSpc>
+              <a:spcAft>
+                <a:spcPts val="700"/>
+              </a:spcAft>
+              <a:buNone/>
+            </a:pPr>
+            <a:r>
+              <a:rPr lang="en-US" sz="950" dirty="0">
+                <a:solidFill>
+                  <a:srgbClr val="1B2559"/>
+                </a:solidFill>
+                <a:latin typeface="Georgia" pitchFamily="34" charset="0"/>
+                <a:ea typeface="Georgia" pitchFamily="34" charset="-122"/>
+                <a:cs typeface="Georgia" pitchFamily="34" charset="-120"/>
+              </a:rPr>
+              <a:t> I am a very enthusiastic photographer, </a:t>
             </a:r>
             <a:pPr indent="0" marL="0">
               <a:lnSpc>
@@ -8686,7 +9326,47 @@
                 <a:ea typeface="Georgia" pitchFamily="34" charset="-122"/>
                 <a:cs typeface="Georgia" pitchFamily="34" charset="-120"/>
               </a:rPr>
-              <a:t>, and we were walking back to the hotel when we saw someone feeding the birds. I only had my little camera with me, but </a:t>
+              <a:t>, and we </a:t>
+            </a:r>
+            <a:pPr indent="0" marL="0">
+              <a:lnSpc>
+                <a:spcPct val="105000"/>
+              </a:lnSpc>
+              <a:spcAft>
+                <a:spcPts val="700"/>
+              </a:spcAft>
+              <a:buNone/>
+            </a:pPr>
+            <a:r>
+              <a:rPr lang="en-US" sz="950" b="1" u="sng" dirty="0">
+                <a:solidFill>
+                  <a:srgbClr val="7B5CD6"/>
+                </a:solidFill>
+                <a:latin typeface="Georgia" pitchFamily="34" charset="0"/>
+                <a:ea typeface="Georgia" pitchFamily="34" charset="-122"/>
+                <a:cs typeface="Georgia" pitchFamily="34" charset="-120"/>
+              </a:rPr>
+              <a:t>were walking</a:t>
+            </a:r>
+            <a:pPr indent="0" marL="0">
+              <a:lnSpc>
+                <a:spcPct val="105000"/>
+              </a:lnSpc>
+              <a:spcAft>
+                <a:spcPts val="700"/>
+              </a:spcAft>
+              <a:buNone/>
+            </a:pPr>
+            <a:r>
+              <a:rPr lang="en-US" sz="950" dirty="0">
+                <a:solidFill>
+                  <a:srgbClr val="1B2559"/>
+                </a:solidFill>
+                <a:latin typeface="Georgia" pitchFamily="34" charset="0"/>
+                <a:ea typeface="Georgia" pitchFamily="34" charset="-122"/>
+                <a:cs typeface="Georgia" pitchFamily="34" charset="-120"/>
+              </a:rPr>
+              <a:t> back to the hotel when we saw someone feeding the birds. I only had my little camera with me, but </a:t>
             </a:r>
             <a:pPr indent="0" marL="0">
               <a:lnSpc>
@@ -22418,7 +23098,91 @@
                 <a:ea typeface="Georgia" pitchFamily="34" charset="-122"/>
                 <a:cs typeface="Georgia" pitchFamily="34" charset="-120"/>
               </a:rPr>
-              <a:t> on the sofa.  (a were sitting · b was sitting · c were siting)</a:t>
+              <a:t> on the sofa.  (a </a:t>
+            </a:r>
+            <a:pPr indent="0" marL="0">
+              <a:buNone/>
+            </a:pPr>
+            <a:r>
+              <a:rPr lang="en-US" sz="1100" b="1" u="sng" dirty="0">
+                <a:solidFill>
+                  <a:srgbClr val="7B5CD6"/>
+                </a:solidFill>
+                <a:latin typeface="Georgia" pitchFamily="34" charset="0"/>
+                <a:ea typeface="Georgia" pitchFamily="34" charset="-122"/>
+                <a:cs typeface="Georgia" pitchFamily="34" charset="-120"/>
+              </a:rPr>
+              <a:t>were sitting</a:t>
+            </a:r>
+            <a:pPr indent="0" marL="0">
+              <a:buNone/>
+            </a:pPr>
+            <a:r>
+              <a:rPr lang="en-US" sz="1100" dirty="0">
+                <a:solidFill>
+                  <a:srgbClr val="1B2559"/>
+                </a:solidFill>
+                <a:latin typeface="Georgia" pitchFamily="34" charset="0"/>
+                <a:ea typeface="Georgia" pitchFamily="34" charset="-122"/>
+                <a:cs typeface="Georgia" pitchFamily="34" charset="-120"/>
+              </a:rPr>
+              <a:t> · b </a:t>
+            </a:r>
+            <a:pPr indent="0" marL="0">
+              <a:buNone/>
+            </a:pPr>
+            <a:r>
+              <a:rPr lang="en-US" sz="1100" b="1" u="sng" dirty="0">
+                <a:solidFill>
+                  <a:srgbClr val="7B5CD6"/>
+                </a:solidFill>
+                <a:latin typeface="Georgia" pitchFamily="34" charset="0"/>
+                <a:ea typeface="Georgia" pitchFamily="34" charset="-122"/>
+                <a:cs typeface="Georgia" pitchFamily="34" charset="-120"/>
+              </a:rPr>
+              <a:t>was sitting</a:t>
+            </a:r>
+            <a:pPr indent="0" marL="0">
+              <a:buNone/>
+            </a:pPr>
+            <a:r>
+              <a:rPr lang="en-US" sz="1100" dirty="0">
+                <a:solidFill>
+                  <a:srgbClr val="1B2559"/>
+                </a:solidFill>
+                <a:latin typeface="Georgia" pitchFamily="34" charset="0"/>
+                <a:ea typeface="Georgia" pitchFamily="34" charset="-122"/>
+                <a:cs typeface="Georgia" pitchFamily="34" charset="-120"/>
+              </a:rPr>
+              <a:t> · c </a:t>
+            </a:r>
+            <a:pPr indent="0" marL="0">
+              <a:buNone/>
+            </a:pPr>
+            <a:r>
+              <a:rPr lang="en-US" sz="1100" b="1" u="sng" dirty="0">
+                <a:solidFill>
+                  <a:srgbClr val="7B5CD6"/>
+                </a:solidFill>
+                <a:latin typeface="Georgia" pitchFamily="34" charset="0"/>
+                <a:ea typeface="Georgia" pitchFamily="34" charset="-122"/>
+                <a:cs typeface="Georgia" pitchFamily="34" charset="-120"/>
+              </a:rPr>
+              <a:t>were siting</a:t>
+            </a:r>
+            <a:pPr indent="0" marL="0">
+              <a:buNone/>
+            </a:pPr>
+            <a:r>
+              <a:rPr lang="en-US" sz="1100" dirty="0">
+                <a:solidFill>
+                  <a:srgbClr val="1B2559"/>
+                </a:solidFill>
+                <a:latin typeface="Georgia" pitchFamily="34" charset="0"/>
+                <a:ea typeface="Georgia" pitchFamily="34" charset="-122"/>
+                <a:cs typeface="Georgia" pitchFamily="34" charset="-120"/>
+              </a:rPr>
+              <a:t>)</a:t>
             </a:r>
             <a:endParaRPr lang="en-US" sz="1100" dirty="0"/>
           </a:p>
@@ -22490,7 +23254,91 @@
                 <a:ea typeface="Georgia" pitchFamily="34" charset="-122"/>
                 <a:cs typeface="Georgia" pitchFamily="34" charset="-120"/>
               </a:rPr>
-              <a:t> on the sofa.  (a were sitting · b was sitting · c were siting)</a:t>
+              <a:t> on the sofa.  (a </a:t>
+            </a:r>
+            <a:pPr indent="0" marL="0">
+              <a:buNone/>
+            </a:pPr>
+            <a:r>
+              <a:rPr lang="en-US" sz="1100" b="1" u="sng" dirty="0">
+                <a:solidFill>
+                  <a:srgbClr val="7B5CD6"/>
+                </a:solidFill>
+                <a:latin typeface="Georgia" pitchFamily="34" charset="0"/>
+                <a:ea typeface="Georgia" pitchFamily="34" charset="-122"/>
+                <a:cs typeface="Georgia" pitchFamily="34" charset="-120"/>
+              </a:rPr>
+              <a:t>were sitting</a:t>
+            </a:r>
+            <a:pPr indent="0" marL="0">
+              <a:buNone/>
+            </a:pPr>
+            <a:r>
+              <a:rPr lang="en-US" sz="1100" dirty="0">
+                <a:solidFill>
+                  <a:srgbClr val="1B2559"/>
+                </a:solidFill>
+                <a:latin typeface="Georgia" pitchFamily="34" charset="0"/>
+                <a:ea typeface="Georgia" pitchFamily="34" charset="-122"/>
+                <a:cs typeface="Georgia" pitchFamily="34" charset="-120"/>
+              </a:rPr>
+              <a:t> · b </a:t>
+            </a:r>
+            <a:pPr indent="0" marL="0">
+              <a:buNone/>
+            </a:pPr>
+            <a:r>
+              <a:rPr lang="en-US" sz="1100" b="1" u="sng" dirty="0">
+                <a:solidFill>
+                  <a:srgbClr val="7B5CD6"/>
+                </a:solidFill>
+                <a:latin typeface="Georgia" pitchFamily="34" charset="0"/>
+                <a:ea typeface="Georgia" pitchFamily="34" charset="-122"/>
+                <a:cs typeface="Georgia" pitchFamily="34" charset="-120"/>
+              </a:rPr>
+              <a:t>was sitting</a:t>
+            </a:r>
+            <a:pPr indent="0" marL="0">
+              <a:buNone/>
+            </a:pPr>
+            <a:r>
+              <a:rPr lang="en-US" sz="1100" dirty="0">
+                <a:solidFill>
+                  <a:srgbClr val="1B2559"/>
+                </a:solidFill>
+                <a:latin typeface="Georgia" pitchFamily="34" charset="0"/>
+                <a:ea typeface="Georgia" pitchFamily="34" charset="-122"/>
+                <a:cs typeface="Georgia" pitchFamily="34" charset="-120"/>
+              </a:rPr>
+              <a:t> · c </a:t>
+            </a:r>
+            <a:pPr indent="0" marL="0">
+              <a:buNone/>
+            </a:pPr>
+            <a:r>
+              <a:rPr lang="en-US" sz="1100" b="1" u="sng" dirty="0">
+                <a:solidFill>
+                  <a:srgbClr val="7B5CD6"/>
+                </a:solidFill>
+                <a:latin typeface="Georgia" pitchFamily="34" charset="0"/>
+                <a:ea typeface="Georgia" pitchFamily="34" charset="-122"/>
+                <a:cs typeface="Georgia" pitchFamily="34" charset="-120"/>
+              </a:rPr>
+              <a:t>were siting</a:t>
+            </a:r>
+            <a:pPr indent="0" marL="0">
+              <a:buNone/>
+            </a:pPr>
+            <a:r>
+              <a:rPr lang="en-US" sz="1100" dirty="0">
+                <a:solidFill>
+                  <a:srgbClr val="1B2559"/>
+                </a:solidFill>
+                <a:latin typeface="Georgia" pitchFamily="34" charset="0"/>
+                <a:ea typeface="Georgia" pitchFamily="34" charset="-122"/>
+                <a:cs typeface="Georgia" pitchFamily="34" charset="-120"/>
+              </a:rPr>
+              <a:t>)</a:t>
             </a:r>
             <a:endParaRPr lang="en-US" sz="1100" dirty="0"/>
           </a:p>
@@ -22557,7 +23405,63 @@
                 <a:ea typeface="Georgia" pitchFamily="34" charset="-122"/>
                 <a:cs typeface="Georgia" pitchFamily="34" charset="-120"/>
               </a:rPr>
-              <a:t> at 11 p.m.? You didn't answer my call.  (a you were doing · b you was doing · c were you doing)</a:t>
+              <a:t> at 11 p.m.? You didn't answer my call.  (a you </a:t>
+            </a:r>
+            <a:pPr indent="0" marL="0">
+              <a:buNone/>
+            </a:pPr>
+            <a:r>
+              <a:rPr lang="en-US" sz="1100" b="1" u="sng" dirty="0">
+                <a:solidFill>
+                  <a:srgbClr val="7B5CD6"/>
+                </a:solidFill>
+                <a:latin typeface="Georgia" pitchFamily="34" charset="0"/>
+                <a:ea typeface="Georgia" pitchFamily="34" charset="-122"/>
+                <a:cs typeface="Georgia" pitchFamily="34" charset="-120"/>
+              </a:rPr>
+              <a:t>were doing</a:t>
+            </a:r>
+            <a:pPr indent="0" marL="0">
+              <a:buNone/>
+            </a:pPr>
+            <a:r>
+              <a:rPr lang="en-US" sz="1100" dirty="0">
+                <a:solidFill>
+                  <a:srgbClr val="1B2559"/>
+                </a:solidFill>
+                <a:latin typeface="Georgia" pitchFamily="34" charset="0"/>
+                <a:ea typeface="Georgia" pitchFamily="34" charset="-122"/>
+                <a:cs typeface="Georgia" pitchFamily="34" charset="-120"/>
+              </a:rPr>
+              <a:t> · b you </a:t>
+            </a:r>
+            <a:pPr indent="0" marL="0">
+              <a:buNone/>
+            </a:pPr>
+            <a:r>
+              <a:rPr lang="en-US" sz="1100" b="1" u="sng" dirty="0">
+                <a:solidFill>
+                  <a:srgbClr val="7B5CD6"/>
+                </a:solidFill>
+                <a:latin typeface="Georgia" pitchFamily="34" charset="0"/>
+                <a:ea typeface="Georgia" pitchFamily="34" charset="-122"/>
+                <a:cs typeface="Georgia" pitchFamily="34" charset="-120"/>
+              </a:rPr>
+              <a:t>was doing</a:t>
+            </a:r>
+            <a:pPr indent="0" marL="0">
+              <a:buNone/>
+            </a:pPr>
+            <a:r>
+              <a:rPr lang="en-US" sz="1100" dirty="0">
+                <a:solidFill>
+                  <a:srgbClr val="1B2559"/>
+                </a:solidFill>
+                <a:latin typeface="Georgia" pitchFamily="34" charset="0"/>
+                <a:ea typeface="Georgia" pitchFamily="34" charset="-122"/>
+                <a:cs typeface="Georgia" pitchFamily="34" charset="-120"/>
+              </a:rPr>
+              <a:t> · c were you doing)</a:t>
             </a:r>
             <a:endParaRPr lang="en-US" sz="1100" dirty="0"/>
           </a:p>
@@ -22629,7 +23533,63 @@
                 <a:ea typeface="Georgia" pitchFamily="34" charset="-122"/>
                 <a:cs typeface="Georgia" pitchFamily="34" charset="-120"/>
               </a:rPr>
-              <a:t> at 11 p.m.? You didn't answer my call.  (a you were doing · b you was doing · c were you doing)</a:t>
+              <a:t> at 11 p.m.? You didn't answer my call.  (a you </a:t>
+            </a:r>
+            <a:pPr indent="0" marL="0">
+              <a:buNone/>
+            </a:pPr>
+            <a:r>
+              <a:rPr lang="en-US" sz="1100" b="1" u="sng" dirty="0">
+                <a:solidFill>
+                  <a:srgbClr val="7B5CD6"/>
+                </a:solidFill>
+                <a:latin typeface="Georgia" pitchFamily="34" charset="0"/>
+                <a:ea typeface="Georgia" pitchFamily="34" charset="-122"/>
+                <a:cs typeface="Georgia" pitchFamily="34" charset="-120"/>
+              </a:rPr>
+              <a:t>were doing</a:t>
+            </a:r>
+            <a:pPr indent="0" marL="0">
+              <a:buNone/>
+            </a:pPr>
+            <a:r>
+              <a:rPr lang="en-US" sz="1100" dirty="0">
+                <a:solidFill>
+                  <a:srgbClr val="1B2559"/>
+                </a:solidFill>
+                <a:latin typeface="Georgia" pitchFamily="34" charset="0"/>
+                <a:ea typeface="Georgia" pitchFamily="34" charset="-122"/>
+                <a:cs typeface="Georgia" pitchFamily="34" charset="-120"/>
+              </a:rPr>
+              <a:t> · b you </a:t>
+            </a:r>
+            <a:pPr indent="0" marL="0">
+              <a:buNone/>
+            </a:pPr>
+            <a:r>
+              <a:rPr lang="en-US" sz="1100" b="1" u="sng" dirty="0">
+                <a:solidFill>
+                  <a:srgbClr val="7B5CD6"/>
+                </a:solidFill>
+                <a:latin typeface="Georgia" pitchFamily="34" charset="0"/>
+                <a:ea typeface="Georgia" pitchFamily="34" charset="-122"/>
+                <a:cs typeface="Georgia" pitchFamily="34" charset="-120"/>
+              </a:rPr>
+              <a:t>was doing</a:t>
+            </a:r>
+            <a:pPr indent="0" marL="0">
+              <a:buNone/>
+            </a:pPr>
+            <a:r>
+              <a:rPr lang="en-US" sz="1100" dirty="0">
+                <a:solidFill>
+                  <a:srgbClr val="1B2559"/>
+                </a:solidFill>
+                <a:latin typeface="Georgia" pitchFamily="34" charset="0"/>
+                <a:ea typeface="Georgia" pitchFamily="34" charset="-122"/>
+                <a:cs typeface="Georgia" pitchFamily="34" charset="-120"/>
+              </a:rPr>
+              <a:t> · c were you doing)</a:t>
             </a:r>
             <a:endParaRPr lang="en-US" sz="1100" dirty="0"/>
           </a:p>
@@ -22668,7 +23628,35 @@
                 <a:ea typeface="Georgia" pitchFamily="34" charset="-122"/>
                 <a:cs typeface="Georgia" pitchFamily="34" charset="-120"/>
               </a:rPr>
-              <a:t>13  She couldn't see him because she </a:t>
+              <a:t>13  She couldn't see him </a:t>
+            </a:r>
+            <a:pPr indent="0" marL="0">
+              <a:buNone/>
+            </a:pPr>
+            <a:r>
+              <a:rPr lang="en-US" sz="1100" b="1" u="sng" dirty="0">
+                <a:solidFill>
+                  <a:srgbClr val="7B5CD6"/>
+                </a:solidFill>
+                <a:latin typeface="Georgia" pitchFamily="34" charset="0"/>
+                <a:ea typeface="Georgia" pitchFamily="34" charset="-122"/>
+                <a:cs typeface="Georgia" pitchFamily="34" charset="-120"/>
+              </a:rPr>
+              <a:t>because</a:t>
+            </a:r>
+            <a:pPr indent="0" marL="0">
+              <a:buNone/>
+            </a:pPr>
+            <a:r>
+              <a:rPr lang="en-US" sz="1100" dirty="0">
+                <a:solidFill>
+                  <a:srgbClr val="1B2559"/>
+                </a:solidFill>
+                <a:latin typeface="Georgia" pitchFamily="34" charset="0"/>
+                <a:ea typeface="Georgia" pitchFamily="34" charset="-122"/>
+                <a:cs typeface="Georgia" pitchFamily="34" charset="-120"/>
+              </a:rPr>
+              <a:t> she </a:t>
             </a:r>
             <a:pPr indent="0" marL="0">
               <a:buNone/>
@@ -22737,7 +23725,35 @@
                 <a:ea typeface="Georgia" pitchFamily="34" charset="-122"/>
                 <a:cs typeface="Georgia" pitchFamily="34" charset="-120"/>
               </a:rPr>
-              <a:t>13  She couldn't see him because she </a:t>
+              <a:t>13  She couldn't see him </a:t>
+            </a:r>
+            <a:pPr indent="0" marL="0">
+              <a:buNone/>
+            </a:pPr>
+            <a:r>
+              <a:rPr lang="en-US" sz="1100" b="1" u="sng" dirty="0">
+                <a:solidFill>
+                  <a:srgbClr val="7B5CD6"/>
+                </a:solidFill>
+                <a:latin typeface="Georgia" pitchFamily="34" charset="0"/>
+                <a:ea typeface="Georgia" pitchFamily="34" charset="-122"/>
+                <a:cs typeface="Georgia" pitchFamily="34" charset="-120"/>
+              </a:rPr>
+              <a:t>because</a:t>
+            </a:r>
+            <a:pPr indent="0" marL="0">
+              <a:buNone/>
+            </a:pPr>
+            <a:r>
+              <a:rPr lang="en-US" sz="1100" dirty="0">
+                <a:solidFill>
+                  <a:srgbClr val="1B2559"/>
+                </a:solidFill>
+                <a:latin typeface="Georgia" pitchFamily="34" charset="0"/>
+                <a:ea typeface="Georgia" pitchFamily="34" charset="-122"/>
+                <a:cs typeface="Georgia" pitchFamily="34" charset="-120"/>
+              </a:rPr>
+              <a:t> she </a:t>
             </a:r>
             <a:pPr indent="0" marL="0">
               <a:buNone/>
@@ -22974,7 +23990,91 @@
                 <a:ea typeface="Georgia" pitchFamily="34" charset="-122"/>
                 <a:cs typeface="Georgia" pitchFamily="34" charset="-120"/>
               </a:rPr>
-              <a:t> the weather wasn't very good.  (a so · b because · c although)</a:t>
+              <a:t> the weather wasn't very good.  (a </a:t>
+            </a:r>
+            <a:pPr indent="0" marL="0">
+              <a:buNone/>
+            </a:pPr>
+            <a:r>
+              <a:rPr lang="en-US" sz="1100" b="1" u="sng" dirty="0">
+                <a:solidFill>
+                  <a:srgbClr val="7B5CD6"/>
+                </a:solidFill>
+                <a:latin typeface="Georgia" pitchFamily="34" charset="0"/>
+                <a:ea typeface="Georgia" pitchFamily="34" charset="-122"/>
+                <a:cs typeface="Georgia" pitchFamily="34" charset="-120"/>
+              </a:rPr>
+              <a:t>so</a:t>
+            </a:r>
+            <a:pPr indent="0" marL="0">
+              <a:buNone/>
+            </a:pPr>
+            <a:r>
+              <a:rPr lang="en-US" sz="1100" dirty="0">
+                <a:solidFill>
+                  <a:srgbClr val="1B2559"/>
+                </a:solidFill>
+                <a:latin typeface="Georgia" pitchFamily="34" charset="0"/>
+                <a:ea typeface="Georgia" pitchFamily="34" charset="-122"/>
+                <a:cs typeface="Georgia" pitchFamily="34" charset="-120"/>
+              </a:rPr>
+              <a:t> · b </a:t>
+            </a:r>
+            <a:pPr indent="0" marL="0">
+              <a:buNone/>
+            </a:pPr>
+            <a:r>
+              <a:rPr lang="en-US" sz="1100" b="1" u="sng" dirty="0">
+                <a:solidFill>
+                  <a:srgbClr val="7B5CD6"/>
+                </a:solidFill>
+                <a:latin typeface="Georgia" pitchFamily="34" charset="0"/>
+                <a:ea typeface="Georgia" pitchFamily="34" charset="-122"/>
+                <a:cs typeface="Georgia" pitchFamily="34" charset="-120"/>
+              </a:rPr>
+              <a:t>because</a:t>
+            </a:r>
+            <a:pPr indent="0" marL="0">
+              <a:buNone/>
+            </a:pPr>
+            <a:r>
+              <a:rPr lang="en-US" sz="1100" dirty="0">
+                <a:solidFill>
+                  <a:srgbClr val="1B2559"/>
+                </a:solidFill>
+                <a:latin typeface="Georgia" pitchFamily="34" charset="0"/>
+                <a:ea typeface="Georgia" pitchFamily="34" charset="-122"/>
+                <a:cs typeface="Georgia" pitchFamily="34" charset="-120"/>
+              </a:rPr>
+              <a:t> · c </a:t>
+            </a:r>
+            <a:pPr indent="0" marL="0">
+              <a:buNone/>
+            </a:pPr>
+            <a:r>
+              <a:rPr lang="en-US" sz="1100" b="1" u="sng" dirty="0">
+                <a:solidFill>
+                  <a:srgbClr val="7B5CD6"/>
+                </a:solidFill>
+                <a:latin typeface="Georgia" pitchFamily="34" charset="0"/>
+                <a:ea typeface="Georgia" pitchFamily="34" charset="-122"/>
+                <a:cs typeface="Georgia" pitchFamily="34" charset="-120"/>
+              </a:rPr>
+              <a:t>although</a:t>
+            </a:r>
+            <a:pPr indent="0" marL="0">
+              <a:buNone/>
+            </a:pPr>
+            <a:r>
+              <a:rPr lang="en-US" sz="1100" dirty="0">
+                <a:solidFill>
+                  <a:srgbClr val="1B2559"/>
+                </a:solidFill>
+                <a:latin typeface="Georgia" pitchFamily="34" charset="0"/>
+                <a:ea typeface="Georgia" pitchFamily="34" charset="-122"/>
+                <a:cs typeface="Georgia" pitchFamily="34" charset="-120"/>
+              </a:rPr>
+              <a:t>)</a:t>
             </a:r>
             <a:endParaRPr lang="en-US" sz="1100" dirty="0"/>
           </a:p>
@@ -23046,7 +24146,91 @@
                 <a:ea typeface="Georgia" pitchFamily="34" charset="-122"/>
                 <a:cs typeface="Georgia" pitchFamily="34" charset="-120"/>
               </a:rPr>
-              <a:t> the weather wasn't very good.  (a so · b because · c although)</a:t>
+              <a:t> the weather wasn't very good.  (a </a:t>
+            </a:r>
+            <a:pPr indent="0" marL="0">
+              <a:buNone/>
+            </a:pPr>
+            <a:r>
+              <a:rPr lang="en-US" sz="1100" b="1" u="sng" dirty="0">
+                <a:solidFill>
+                  <a:srgbClr val="7B5CD6"/>
+                </a:solidFill>
+                <a:latin typeface="Georgia" pitchFamily="34" charset="0"/>
+                <a:ea typeface="Georgia" pitchFamily="34" charset="-122"/>
+                <a:cs typeface="Georgia" pitchFamily="34" charset="-120"/>
+              </a:rPr>
+              <a:t>so</a:t>
+            </a:r>
+            <a:pPr indent="0" marL="0">
+              <a:buNone/>
+            </a:pPr>
+            <a:r>
+              <a:rPr lang="en-US" sz="1100" dirty="0">
+                <a:solidFill>
+                  <a:srgbClr val="1B2559"/>
+                </a:solidFill>
+                <a:latin typeface="Georgia" pitchFamily="34" charset="0"/>
+                <a:ea typeface="Georgia" pitchFamily="34" charset="-122"/>
+                <a:cs typeface="Georgia" pitchFamily="34" charset="-120"/>
+              </a:rPr>
+              <a:t> · b </a:t>
+            </a:r>
+            <a:pPr indent="0" marL="0">
+              <a:buNone/>
+            </a:pPr>
+            <a:r>
+              <a:rPr lang="en-US" sz="1100" b="1" u="sng" dirty="0">
+                <a:solidFill>
+                  <a:srgbClr val="7B5CD6"/>
+                </a:solidFill>
+                <a:latin typeface="Georgia" pitchFamily="34" charset="0"/>
+                <a:ea typeface="Georgia" pitchFamily="34" charset="-122"/>
+                <a:cs typeface="Georgia" pitchFamily="34" charset="-120"/>
+              </a:rPr>
+              <a:t>because</a:t>
+            </a:r>
+            <a:pPr indent="0" marL="0">
+              <a:buNone/>
+            </a:pPr>
+            <a:r>
+              <a:rPr lang="en-US" sz="1100" dirty="0">
+                <a:solidFill>
+                  <a:srgbClr val="1B2559"/>
+                </a:solidFill>
+                <a:latin typeface="Georgia" pitchFamily="34" charset="0"/>
+                <a:ea typeface="Georgia" pitchFamily="34" charset="-122"/>
+                <a:cs typeface="Georgia" pitchFamily="34" charset="-120"/>
+              </a:rPr>
+              <a:t> · c </a:t>
+            </a:r>
+            <a:pPr indent="0" marL="0">
+              <a:buNone/>
+            </a:pPr>
+            <a:r>
+              <a:rPr lang="en-US" sz="1100" b="1" u="sng" dirty="0">
+                <a:solidFill>
+                  <a:srgbClr val="7B5CD6"/>
+                </a:solidFill>
+                <a:latin typeface="Georgia" pitchFamily="34" charset="0"/>
+                <a:ea typeface="Georgia" pitchFamily="34" charset="-122"/>
+                <a:cs typeface="Georgia" pitchFamily="34" charset="-120"/>
+              </a:rPr>
+              <a:t>although</a:t>
+            </a:r>
+            <a:pPr indent="0" marL="0">
+              <a:buNone/>
+            </a:pPr>
+            <a:r>
+              <a:rPr lang="en-US" sz="1100" dirty="0">
+                <a:solidFill>
+                  <a:srgbClr val="1B2559"/>
+                </a:solidFill>
+                <a:latin typeface="Georgia" pitchFamily="34" charset="0"/>
+                <a:ea typeface="Georgia" pitchFamily="34" charset="-122"/>
+                <a:cs typeface="Georgia" pitchFamily="34" charset="-120"/>
+              </a:rPr>
+              <a:t>)</a:t>
             </a:r>
             <a:endParaRPr lang="en-US" sz="1100" dirty="0"/>
           </a:p>
